--- a/examples/repositories/presentation-delivery/deck.pptx
+++ b/examples/repositories/presentation-delivery/deck.pptx
@@ -1498,7 +1498,7 @@
         <p:spPr>
           <a:xfrm>
             <a:off x="660350" y="3165128"/>
-            <a:ext cx="11088573" cy="865882"/>
+            <a:ext cx="10871150" cy="865882"/>
           </a:xfrm>
           <a:prstGeom prst="rect">
             <a:avLst/>
@@ -1514,9 +1514,6 @@
               <a:lnSpc>
                 <a:spcPts val="3410"/>
               </a:lnSpc>
-              <a:spcBef>
-                <a:spcPts val="2200"/>
-              </a:spcBef>
               <a:buNone/>
             </a:pPr>
             <a:r>
@@ -1537,9 +1534,6 @@
               <a:lnSpc>
                 <a:spcPts val="3410"/>
               </a:lnSpc>
-              <a:spcBef>
-                <a:spcPts val="2200"/>
-              </a:spcBef>
               <a:buNone/>
             </a:pPr>
             <a:r>
@@ -2151,7 +2145,7 @@
         <p:spPr>
           <a:xfrm>
             <a:off x="660350" y="3658493"/>
-            <a:ext cx="3488927" cy="685800"/>
+            <a:ext cx="3420517" cy="685800"/>
           </a:xfrm>
           <a:prstGeom prst="rect">
             <a:avLst/>
@@ -2167,9 +2161,6 @@
               <a:lnSpc>
                 <a:spcPts val="2700"/>
               </a:lnSpc>
-              <a:spcBef>
-                <a:spcPts val="1700"/>
-              </a:spcBef>
               <a:buNone/>
             </a:pPr>
             <a:r>
@@ -2190,9 +2181,6 @@
               <a:lnSpc>
                 <a:spcPts val="2700"/>
               </a:lnSpc>
-              <a:spcBef>
-                <a:spcPts val="1700"/>
-              </a:spcBef>
               <a:buNone/>
             </a:pPr>
             <a:r>
@@ -2329,7 +2317,7 @@
         <p:spPr>
           <a:xfrm>
             <a:off x="4385667" y="3658493"/>
-            <a:ext cx="3488927" cy="685800"/>
+            <a:ext cx="3420517" cy="685800"/>
           </a:xfrm>
           <a:prstGeom prst="rect">
             <a:avLst/>
@@ -2345,9 +2333,6 @@
               <a:lnSpc>
                 <a:spcPts val="2700"/>
               </a:lnSpc>
-              <a:spcBef>
-                <a:spcPts val="1700"/>
-              </a:spcBef>
               <a:buNone/>
             </a:pPr>
             <a:r>
@@ -2368,9 +2353,6 @@
               <a:lnSpc>
                 <a:spcPts val="2700"/>
               </a:lnSpc>
-              <a:spcBef>
-                <a:spcPts val="1700"/>
-              </a:spcBef>
               <a:buNone/>
             </a:pPr>
             <a:r>
@@ -2507,7 +2489,7 @@
         <p:spPr>
           <a:xfrm>
             <a:off x="8110984" y="3658493"/>
-            <a:ext cx="3488927" cy="685800"/>
+            <a:ext cx="3420517" cy="685800"/>
           </a:xfrm>
           <a:prstGeom prst="rect">
             <a:avLst/>
@@ -2523,9 +2505,6 @@
               <a:lnSpc>
                 <a:spcPts val="2700"/>
               </a:lnSpc>
-              <a:spcBef>
-                <a:spcPts val="1700"/>
-              </a:spcBef>
               <a:buNone/>
             </a:pPr>
             <a:r>
@@ -2546,9 +2525,6 @@
               <a:lnSpc>
                 <a:spcPts val="2700"/>
               </a:lnSpc>
-              <a:spcBef>
-                <a:spcPts val="1700"/>
-              </a:spcBef>
               <a:buNone/>
             </a:pPr>
             <a:r>
@@ -2881,52 +2857,7 @@
         </p:nvSpPr>
         <p:spPr>
           <a:xfrm>
-            <a:off x="660350" y="1958132"/>
-            <a:ext cx="11088573" cy="432941"/>
-          </a:xfrm>
-          <a:prstGeom prst="rect">
-            <a:avLst/>
-          </a:prstGeom>
-          <a:noFill/>
-          <a:ln/>
-        </p:spPr>
-        <p:txBody>
-          <a:bodyPr wrap="square" lIns="0" tIns="0" rIns="0" bIns="0" rtlCol="0" anchor="t"/>
-          <a:lstStyle/>
-          <a:p>
-            <a:pPr algn="l" indent="0" marL="0">
-              <a:lnSpc>
-                <a:spcPts val="3410"/>
-              </a:lnSpc>
-              <a:spcBef>
-                <a:spcPts val="2200"/>
-              </a:spcBef>
-              <a:buNone/>
-            </a:pPr>
-            <a:r>
-              <a:rPr lang="en-US" sz="2200" dirty="0">
-                <a:solidFill>
-                  <a:srgbClr val="203E31"/>
-                </a:solidFill>
-                <a:latin typeface="BIZ UDPGothic" pitchFamily="34" charset="0"/>
-                <a:ea typeface="BIZ UDPGothic" pitchFamily="34" charset="-122"/>
-                <a:cs typeface="BIZ UDPGothic" pitchFamily="34" charset="-120"/>
-              </a:rPr>
-              <a:t>同じ資料の「最新版はどれ？」を減らすために。</a:t>
-            </a:r>
-            <a:endParaRPr lang="en-US" sz="2200" dirty="0"/>
-          </a:p>
-        </p:txBody>
-      </p:sp>
-      <p:sp>
-        <p:nvSpPr>
-          <p:cNvPr id="7" name="Text 5"/>
-          <p:cNvSpPr/>
-          <p:nvPr/>
-        </p:nvSpPr>
-        <p:spPr>
-          <a:xfrm>
-            <a:off x="660350" y="2695873"/>
+            <a:off x="660350" y="1983581"/>
             <a:ext cx="10871150" cy="980182"/>
           </a:xfrm>
           <a:prstGeom prst="rect">
@@ -2950,13 +2881,13 @@
       </p:sp>
       <p:sp>
         <p:nvSpPr>
-          <p:cNvPr id="8" name="Text 6"/>
-          <p:cNvSpPr/>
-          <p:nvPr/>
-        </p:nvSpPr>
-        <p:spPr>
-          <a:xfrm>
-            <a:off x="965150" y="2937123"/>
+          <p:cNvPr id="7" name="Text 5"/>
+          <p:cNvSpPr/>
+          <p:nvPr/>
+        </p:nvSpPr>
+        <p:spPr>
+          <a:xfrm>
+            <a:off x="965150" y="2224832"/>
             <a:ext cx="10466781" cy="497681"/>
           </a:xfrm>
           <a:prstGeom prst="rect">
@@ -2992,20 +2923,20 @@
       </p:sp>
       <p:sp>
         <p:nvSpPr>
-          <p:cNvPr id="9" name="Shape 7"/>
-          <p:cNvSpPr/>
-          <p:nvPr/>
-        </p:nvSpPr>
-        <p:spPr>
-          <a:xfrm>
-            <a:off x="660350" y="3990380"/>
-            <a:ext cx="3420517" cy="0"/>
+          <p:cNvPr id="8" name="Shape 6"/>
+          <p:cNvSpPr/>
+          <p:nvPr/>
+        </p:nvSpPr>
+        <p:spPr>
+          <a:xfrm>
+            <a:off x="660350" y="3822502"/>
+            <a:ext cx="10871150" cy="0"/>
           </a:xfrm>
           <a:prstGeom prst="line">
             <a:avLst/>
           </a:prstGeom>
           <a:noFill/>
-          <a:ln w="19050">
+          <a:ln w="9525">
             <a:solidFill>
               <a:srgbClr val="708571"/>
             </a:solidFill>
@@ -3015,33 +2946,75 @@
       </p:sp>
       <p:sp>
         <p:nvSpPr>
+          <p:cNvPr id="9" name="Text 7"/>
+          <p:cNvSpPr/>
+          <p:nvPr/>
+        </p:nvSpPr>
+        <p:spPr>
+          <a:xfrm>
+            <a:off x="660350" y="3263652"/>
+            <a:ext cx="310896" cy="457200"/>
+          </a:xfrm>
+          <a:prstGeom prst="rect">
+            <a:avLst/>
+          </a:prstGeom>
+          <a:noFill/>
+          <a:ln/>
+        </p:spPr>
+        <p:txBody>
+          <a:bodyPr wrap="square" lIns="0" tIns="0" rIns="0" bIns="0" rtlCol="0" anchor="t"/>
+          <a:lstStyle/>
+          <a:p>
+            <a:pPr algn="l" indent="0" marL="0">
+              <a:lnSpc>
+                <a:spcPts val="3600"/>
+              </a:lnSpc>
+              <a:buNone/>
+            </a:pPr>
+            <a:r>
+              <a:rPr lang="en-US" sz="2400" dirty="0">
+                <a:solidFill>
+                  <a:srgbClr val="577258"/>
+                </a:solidFill>
+                <a:latin typeface="BIZ UDPGothic" pitchFamily="34" charset="0"/>
+                <a:ea typeface="BIZ UDPGothic" pitchFamily="34" charset="-122"/>
+                <a:cs typeface="BIZ UDPGothic" pitchFamily="34" charset="-120"/>
+              </a:rPr>
+              <a:t>→</a:t>
+            </a:r>
+            <a:endParaRPr lang="en-US" sz="2400" dirty="0"/>
+          </a:p>
+        </p:txBody>
+      </p:sp>
+      <p:sp>
+        <p:nvSpPr>
           <p:cNvPr id="10" name="Text 8"/>
           <p:cNvSpPr/>
           <p:nvPr/>
         </p:nvSpPr>
         <p:spPr>
           <a:xfrm>
-            <a:off x="660350" y="4152305"/>
-            <a:ext cx="3488927" cy="266700"/>
-          </a:xfrm>
-          <a:prstGeom prst="rect">
-            <a:avLst/>
-          </a:prstGeom>
-          <a:noFill/>
-          <a:ln/>
-        </p:spPr>
-        <p:txBody>
-          <a:bodyPr wrap="square" lIns="0" tIns="0" rIns="0" bIns="0" rtlCol="0" anchor="t"/>
-          <a:lstStyle/>
-          <a:p>
-            <a:pPr algn="l" indent="0" marL="0">
-              <a:lnSpc>
-                <a:spcPts val="2100"/>
-              </a:lnSpc>
-              <a:buNone/>
-            </a:pPr>
-            <a:r>
-              <a:rPr lang="en-US" sz="1400" dirty="0">
+            <a:off x="1193750" y="3340001"/>
+            <a:ext cx="647599" cy="304651"/>
+          </a:xfrm>
+          <a:prstGeom prst="rect">
+            <a:avLst/>
+          </a:prstGeom>
+          <a:noFill/>
+          <a:ln/>
+        </p:spPr>
+        <p:txBody>
+          <a:bodyPr wrap="square" lIns="0" tIns="0" rIns="0" bIns="0" rtlCol="0" anchor="t"/>
+          <a:lstStyle/>
+          <a:p>
+            <a:pPr algn="l" indent="0" marL="0">
+              <a:lnSpc>
+                <a:spcPts val="2400"/>
+              </a:lnSpc>
+              <a:buNone/>
+            </a:pPr>
+            <a:r>
+              <a:rPr lang="en-US" sz="1600" dirty="0">
                 <a:solidFill>
                   <a:srgbClr val="577258"/>
                 </a:solidFill>
@@ -3051,7 +3024,7 @@
               </a:rPr>
               <a:t>用途</a:t>
             </a:r>
-            <a:endParaRPr lang="en-US" sz="1400" dirty="0"/>
+            <a:endParaRPr lang="en-US" sz="1600" dirty="0"/>
           </a:p>
         </p:txBody>
       </p:sp>
@@ -3063,30 +3036,27 @@
         </p:nvSpPr>
         <p:spPr>
           <a:xfrm>
-            <a:off x="660350" y="4482405"/>
-            <a:ext cx="3488927" cy="426690"/>
-          </a:xfrm>
-          <a:prstGeom prst="rect">
-            <a:avLst/>
-          </a:prstGeom>
-          <a:noFill/>
-          <a:ln/>
-        </p:spPr>
-        <p:txBody>
-          <a:bodyPr wrap="square" lIns="0" tIns="0" rIns="0" bIns="0" rtlCol="0" anchor="t"/>
-          <a:lstStyle/>
-          <a:p>
-            <a:pPr algn="l" indent="0" marL="0">
-              <a:lnSpc>
-                <a:spcPts val="3360"/>
-              </a:lnSpc>
-              <a:spcBef>
-                <a:spcPts val="500"/>
-              </a:spcBef>
-              <a:buNone/>
-            </a:pPr>
-            <a:r>
-              <a:rPr lang="en-US" sz="2400" b="1" dirty="0">
+            <a:off x="2057251" y="3287762"/>
+            <a:ext cx="2331720" cy="408980"/>
+          </a:xfrm>
+          <a:prstGeom prst="rect">
+            <a:avLst/>
+          </a:prstGeom>
+          <a:noFill/>
+          <a:ln/>
+        </p:spPr>
+        <p:txBody>
+          <a:bodyPr wrap="square" lIns="0" tIns="0" rIns="0" bIns="0" rtlCol="0" anchor="t"/>
+          <a:lstStyle/>
+          <a:p>
+            <a:pPr algn="l" indent="0" marL="0">
+              <a:lnSpc>
+                <a:spcPts val="3220"/>
+              </a:lnSpc>
+              <a:buNone/>
+            </a:pPr>
+            <a:r>
+              <a:rPr lang="en-US" sz="2300" b="1" dirty="0">
                 <a:solidFill>
                   <a:srgbClr val="203E31"/>
                 </a:solidFill>
@@ -3096,7 +3066,7 @@
               </a:rPr>
               <a:t>新人案内</a:t>
             </a:r>
-            <a:endParaRPr lang="en-US" sz="2400" dirty="0"/>
+            <a:endParaRPr lang="en-US" sz="2300" dirty="0"/>
           </a:p>
         </p:txBody>
       </p:sp>
@@ -3108,8 +3078,8 @@
         </p:nvSpPr>
         <p:spPr>
           <a:xfrm>
-            <a:off x="660350" y="5010596"/>
-            <a:ext cx="3488927" cy="304651"/>
+            <a:off x="4571851" y="3340001"/>
+            <a:ext cx="1647536" cy="304651"/>
           </a:xfrm>
           <a:prstGeom prst="rect">
             <a:avLst/>
@@ -3125,9 +3095,6 @@
               <a:lnSpc>
                 <a:spcPts val="2400"/>
               </a:lnSpc>
-              <a:spcBef>
-                <a:spcPts val="800"/>
-              </a:spcBef>
               <a:buNone/>
             </a:pPr>
             <a:r>
@@ -3139,7 +3106,7 @@
                 <a:ea typeface="BIZ UDPGothic" pitchFamily="34" charset="-122"/>
                 <a:cs typeface="BIZ UDPGothic" pitchFamily="34" charset="-120"/>
               </a:rPr>
-              <a:t>中身がわかる名前</a:t>
+              <a:t>中身が分かる名前</a:t>
             </a:r>
             <a:endParaRPr lang="en-US" sz="1600" dirty="0"/>
           </a:p>
@@ -3153,14 +3120,14 @@
         </p:nvSpPr>
         <p:spPr>
           <a:xfrm>
-            <a:off x="4385667" y="3990380"/>
-            <a:ext cx="3420517" cy="0"/>
+            <a:off x="660350" y="4482852"/>
+            <a:ext cx="10871150" cy="0"/>
           </a:xfrm>
           <a:prstGeom prst="line">
             <a:avLst/>
           </a:prstGeom>
           <a:noFill/>
-          <a:ln w="19050">
+          <a:ln w="9525">
             <a:solidFill>
               <a:srgbClr val="708571"/>
             </a:solidFill>
@@ -3176,27 +3143,27 @@
         </p:nvSpPr>
         <p:spPr>
           <a:xfrm>
-            <a:off x="4385667" y="4152305"/>
-            <a:ext cx="3488927" cy="266700"/>
-          </a:xfrm>
-          <a:prstGeom prst="rect">
-            <a:avLst/>
-          </a:prstGeom>
-          <a:noFill/>
-          <a:ln/>
-        </p:spPr>
-        <p:txBody>
-          <a:bodyPr wrap="square" lIns="0" tIns="0" rIns="0" bIns="0" rtlCol="0" anchor="t"/>
-          <a:lstStyle/>
-          <a:p>
-            <a:pPr algn="l" indent="0" marL="0">
-              <a:lnSpc>
-                <a:spcPts val="2100"/>
-              </a:lnSpc>
-              <a:buNone/>
-            </a:pPr>
-            <a:r>
-              <a:rPr lang="en-US" sz="1400" dirty="0">
+            <a:off x="660350" y="3924002"/>
+            <a:ext cx="310896" cy="457200"/>
+          </a:xfrm>
+          <a:prstGeom prst="rect">
+            <a:avLst/>
+          </a:prstGeom>
+          <a:noFill/>
+          <a:ln/>
+        </p:spPr>
+        <p:txBody>
+          <a:bodyPr wrap="square" lIns="0" tIns="0" rIns="0" bIns="0" rtlCol="0" anchor="t"/>
+          <a:lstStyle/>
+          <a:p>
+            <a:pPr algn="l" indent="0" marL="0">
+              <a:lnSpc>
+                <a:spcPts val="3600"/>
+              </a:lnSpc>
+              <a:buNone/>
+            </a:pPr>
+            <a:r>
+              <a:rPr lang="en-US" sz="2400" dirty="0">
                 <a:solidFill>
                   <a:srgbClr val="577258"/>
                 </a:solidFill>
@@ -3204,44 +3171,83 @@
                 <a:ea typeface="BIZ UDPGothic" pitchFamily="34" charset="-122"/>
                 <a:cs typeface="BIZ UDPGothic" pitchFamily="34" charset="-120"/>
               </a:rPr>
+              <a:t>→</a:t>
+            </a:r>
+            <a:endParaRPr lang="en-US" sz="2400" dirty="0"/>
+          </a:p>
+        </p:txBody>
+      </p:sp>
+      <p:sp>
+        <p:nvSpPr>
+          <p:cNvPr id="15" name="Text 13"/>
+          <p:cNvSpPr/>
+          <p:nvPr/>
+        </p:nvSpPr>
+        <p:spPr>
+          <a:xfrm>
+            <a:off x="1193750" y="4000351"/>
+            <a:ext cx="647599" cy="304651"/>
+          </a:xfrm>
+          <a:prstGeom prst="rect">
+            <a:avLst/>
+          </a:prstGeom>
+          <a:noFill/>
+          <a:ln/>
+        </p:spPr>
+        <p:txBody>
+          <a:bodyPr wrap="square" lIns="0" tIns="0" rIns="0" bIns="0" rtlCol="0" anchor="t"/>
+          <a:lstStyle/>
+          <a:p>
+            <a:pPr algn="l" indent="0" marL="0">
+              <a:lnSpc>
+                <a:spcPts val="2400"/>
+              </a:lnSpc>
+              <a:buNone/>
+            </a:pPr>
+            <a:r>
+              <a:rPr lang="en-US" sz="1600" dirty="0">
+                <a:solidFill>
+                  <a:srgbClr val="577258"/>
+                </a:solidFill>
+                <a:latin typeface="BIZ UDPGothic" pitchFamily="34" charset="0"/>
+                <a:ea typeface="BIZ UDPGothic" pitchFamily="34" charset="-122"/>
+                <a:cs typeface="BIZ UDPGothic" pitchFamily="34" charset="-120"/>
+              </a:rPr>
               <a:t>版</a:t>
             </a:r>
-            <a:endParaRPr lang="en-US" sz="1400" dirty="0"/>
-          </a:p>
-        </p:txBody>
-      </p:sp>
-      <p:sp>
-        <p:nvSpPr>
-          <p:cNvPr id="15" name="Text 13"/>
-          <p:cNvSpPr/>
-          <p:nvPr/>
-        </p:nvSpPr>
-        <p:spPr>
-          <a:xfrm>
-            <a:off x="4385667" y="4482405"/>
-            <a:ext cx="3488927" cy="426690"/>
-          </a:xfrm>
-          <a:prstGeom prst="rect">
-            <a:avLst/>
-          </a:prstGeom>
-          <a:noFill/>
-          <a:ln/>
-        </p:spPr>
-        <p:txBody>
-          <a:bodyPr wrap="square" lIns="0" tIns="0" rIns="0" bIns="0" rtlCol="0" anchor="t"/>
-          <a:lstStyle/>
-          <a:p>
-            <a:pPr algn="l" indent="0" marL="0">
-              <a:lnSpc>
-                <a:spcPts val="3360"/>
-              </a:lnSpc>
-              <a:spcBef>
-                <a:spcPts val="500"/>
-              </a:spcBef>
-              <a:buNone/>
-            </a:pPr>
-            <a:r>
-              <a:rPr lang="en-US" sz="2400" b="1" dirty="0">
+            <a:endParaRPr lang="en-US" sz="1600" dirty="0"/>
+          </a:p>
+        </p:txBody>
+      </p:sp>
+      <p:sp>
+        <p:nvSpPr>
+          <p:cNvPr id="16" name="Text 14"/>
+          <p:cNvSpPr/>
+          <p:nvPr/>
+        </p:nvSpPr>
+        <p:spPr>
+          <a:xfrm>
+            <a:off x="2057251" y="3948112"/>
+            <a:ext cx="2331720" cy="408980"/>
+          </a:xfrm>
+          <a:prstGeom prst="rect">
+            <a:avLst/>
+          </a:prstGeom>
+          <a:noFill/>
+          <a:ln/>
+        </p:spPr>
+        <p:txBody>
+          <a:bodyPr wrap="square" lIns="0" tIns="0" rIns="0" bIns="0" rtlCol="0" anchor="t"/>
+          <a:lstStyle/>
+          <a:p>
+            <a:pPr algn="l" indent="0" marL="0">
+              <a:lnSpc>
+                <a:spcPts val="3220"/>
+              </a:lnSpc>
+              <a:buNone/>
+            </a:pPr>
+            <a:r>
+              <a:rPr lang="en-US" sz="2300" b="1" dirty="0">
                 <a:solidFill>
                   <a:srgbClr val="203E31"/>
                 </a:solidFill>
@@ -3251,20 +3257,20 @@
               </a:rPr>
               <a:t>v03</a:t>
             </a:r>
-            <a:endParaRPr lang="en-US" sz="2400" dirty="0"/>
-          </a:p>
-        </p:txBody>
-      </p:sp>
-      <p:sp>
-        <p:nvSpPr>
-          <p:cNvPr id="16" name="Text 14"/>
-          <p:cNvSpPr/>
-          <p:nvPr/>
-        </p:nvSpPr>
-        <p:spPr>
-          <a:xfrm>
-            <a:off x="4385667" y="5010596"/>
-            <a:ext cx="3488927" cy="304651"/>
+            <a:endParaRPr lang="en-US" sz="2300" dirty="0"/>
+          </a:p>
+        </p:txBody>
+      </p:sp>
+      <p:sp>
+        <p:nvSpPr>
+          <p:cNvPr id="17" name="Text 15"/>
+          <p:cNvSpPr/>
+          <p:nvPr/>
+        </p:nvSpPr>
+        <p:spPr>
+          <a:xfrm>
+            <a:off x="4571851" y="4000351"/>
+            <a:ext cx="1647536" cy="304651"/>
           </a:xfrm>
           <a:prstGeom prst="rect">
             <a:avLst/>
@@ -3280,9 +3286,6 @@
               <a:lnSpc>
                 <a:spcPts val="2400"/>
               </a:lnSpc>
-              <a:spcBef>
-                <a:spcPts val="800"/>
-              </a:spcBef>
               <a:buNone/>
             </a:pPr>
             <a:r>
@@ -3294,7 +3297,7 @@
                 <a:ea typeface="BIZ UDPGothic" pitchFamily="34" charset="-122"/>
                 <a:cs typeface="BIZ UDPGothic" pitchFamily="34" charset="-120"/>
               </a:rPr>
-              <a:t>更新順がわかる印</a:t>
+              <a:t>更新順が分かる印</a:t>
             </a:r>
             <a:endParaRPr lang="en-US" sz="1600" dirty="0"/>
           </a:p>
@@ -3302,20 +3305,20 @@
       </p:sp>
       <p:sp>
         <p:nvSpPr>
-          <p:cNvPr id="17" name="Shape 15"/>
-          <p:cNvSpPr/>
-          <p:nvPr/>
-        </p:nvSpPr>
-        <p:spPr>
-          <a:xfrm>
-            <a:off x="8110984" y="3990380"/>
-            <a:ext cx="3420517" cy="0"/>
+          <p:cNvPr id="18" name="Shape 16"/>
+          <p:cNvSpPr/>
+          <p:nvPr/>
+        </p:nvSpPr>
+        <p:spPr>
+          <a:xfrm>
+            <a:off x="660350" y="5143202"/>
+            <a:ext cx="10871150" cy="0"/>
           </a:xfrm>
           <a:prstGeom prst="line">
             <a:avLst/>
           </a:prstGeom>
           <a:noFill/>
-          <a:ln w="19050">
+          <a:ln w="9525">
             <a:solidFill>
               <a:srgbClr val="708571"/>
             </a:solidFill>
@@ -3325,33 +3328,33 @@
       </p:sp>
       <p:sp>
         <p:nvSpPr>
-          <p:cNvPr id="18" name="Text 16"/>
-          <p:cNvSpPr/>
-          <p:nvPr/>
-        </p:nvSpPr>
-        <p:spPr>
-          <a:xfrm>
-            <a:off x="8110984" y="4152305"/>
-            <a:ext cx="3488927" cy="266700"/>
-          </a:xfrm>
-          <a:prstGeom prst="rect">
-            <a:avLst/>
-          </a:prstGeom>
-          <a:noFill/>
-          <a:ln/>
-        </p:spPr>
-        <p:txBody>
-          <a:bodyPr wrap="square" lIns="0" tIns="0" rIns="0" bIns="0" rtlCol="0" anchor="t"/>
-          <a:lstStyle/>
-          <a:p>
-            <a:pPr algn="l" indent="0" marL="0">
-              <a:lnSpc>
-                <a:spcPts val="2100"/>
-              </a:lnSpc>
-              <a:buNone/>
-            </a:pPr>
-            <a:r>
-              <a:rPr lang="en-US" sz="1400" dirty="0">
+          <p:cNvPr id="19" name="Text 17"/>
+          <p:cNvSpPr/>
+          <p:nvPr/>
+        </p:nvSpPr>
+        <p:spPr>
+          <a:xfrm>
+            <a:off x="660350" y="4584353"/>
+            <a:ext cx="310896" cy="457200"/>
+          </a:xfrm>
+          <a:prstGeom prst="rect">
+            <a:avLst/>
+          </a:prstGeom>
+          <a:noFill/>
+          <a:ln/>
+        </p:spPr>
+        <p:txBody>
+          <a:bodyPr wrap="square" lIns="0" tIns="0" rIns="0" bIns="0" rtlCol="0" anchor="t"/>
+          <a:lstStyle/>
+          <a:p>
+            <a:pPr algn="l" indent="0" marL="0">
+              <a:lnSpc>
+                <a:spcPts val="3600"/>
+              </a:lnSpc>
+              <a:buNone/>
+            </a:pPr>
+            <a:r>
+              <a:rPr lang="en-US" sz="2400" dirty="0">
                 <a:solidFill>
                   <a:srgbClr val="577258"/>
                 </a:solidFill>
@@ -3359,44 +3362,83 @@
                 <a:ea typeface="BIZ UDPGothic" pitchFamily="34" charset="-122"/>
                 <a:cs typeface="BIZ UDPGothic" pitchFamily="34" charset="-120"/>
               </a:rPr>
+              <a:t>→</a:t>
+            </a:r>
+            <a:endParaRPr lang="en-US" sz="2400" dirty="0"/>
+          </a:p>
+        </p:txBody>
+      </p:sp>
+      <p:sp>
+        <p:nvSpPr>
+          <p:cNvPr id="20" name="Text 18"/>
+          <p:cNvSpPr/>
+          <p:nvPr/>
+        </p:nvSpPr>
+        <p:spPr>
+          <a:xfrm>
+            <a:off x="1193750" y="4660702"/>
+            <a:ext cx="647599" cy="304651"/>
+          </a:xfrm>
+          <a:prstGeom prst="rect">
+            <a:avLst/>
+          </a:prstGeom>
+          <a:noFill/>
+          <a:ln/>
+        </p:spPr>
+        <p:txBody>
+          <a:bodyPr wrap="square" lIns="0" tIns="0" rIns="0" bIns="0" rtlCol="0" anchor="t"/>
+          <a:lstStyle/>
+          <a:p>
+            <a:pPr algn="l" indent="0" marL="0">
+              <a:lnSpc>
+                <a:spcPts val="2400"/>
+              </a:lnSpc>
+              <a:buNone/>
+            </a:pPr>
+            <a:r>
+              <a:rPr lang="en-US" sz="1600" dirty="0">
+                <a:solidFill>
+                  <a:srgbClr val="577258"/>
+                </a:solidFill>
+                <a:latin typeface="BIZ UDPGothic" pitchFamily="34" charset="0"/>
+                <a:ea typeface="BIZ UDPGothic" pitchFamily="34" charset="-122"/>
+                <a:cs typeface="BIZ UDPGothic" pitchFamily="34" charset="-120"/>
+              </a:rPr>
               <a:t>状態</a:t>
             </a:r>
-            <a:endParaRPr lang="en-US" sz="1400" dirty="0"/>
-          </a:p>
-        </p:txBody>
-      </p:sp>
-      <p:sp>
-        <p:nvSpPr>
-          <p:cNvPr id="19" name="Text 17"/>
-          <p:cNvSpPr/>
-          <p:nvPr/>
-        </p:nvSpPr>
-        <p:spPr>
-          <a:xfrm>
-            <a:off x="8110984" y="4482405"/>
-            <a:ext cx="3488927" cy="426690"/>
-          </a:xfrm>
-          <a:prstGeom prst="rect">
-            <a:avLst/>
-          </a:prstGeom>
-          <a:noFill/>
-          <a:ln/>
-        </p:spPr>
-        <p:txBody>
-          <a:bodyPr wrap="square" lIns="0" tIns="0" rIns="0" bIns="0" rtlCol="0" anchor="t"/>
-          <a:lstStyle/>
-          <a:p>
-            <a:pPr algn="l" indent="0" marL="0">
-              <a:lnSpc>
-                <a:spcPts val="3360"/>
-              </a:lnSpc>
-              <a:spcBef>
-                <a:spcPts val="500"/>
-              </a:spcBef>
-              <a:buNone/>
-            </a:pPr>
-            <a:r>
-              <a:rPr lang="en-US" sz="2400" b="1" dirty="0">
+            <a:endParaRPr lang="en-US" sz="1600" dirty="0"/>
+          </a:p>
+        </p:txBody>
+      </p:sp>
+      <p:sp>
+        <p:nvSpPr>
+          <p:cNvPr id="21" name="Text 19"/>
+          <p:cNvSpPr/>
+          <p:nvPr/>
+        </p:nvSpPr>
+        <p:spPr>
+          <a:xfrm>
+            <a:off x="2057251" y="4608463"/>
+            <a:ext cx="2331720" cy="408980"/>
+          </a:xfrm>
+          <a:prstGeom prst="rect">
+            <a:avLst/>
+          </a:prstGeom>
+          <a:noFill/>
+          <a:ln/>
+        </p:spPr>
+        <p:txBody>
+          <a:bodyPr wrap="square" lIns="0" tIns="0" rIns="0" bIns="0" rtlCol="0" anchor="t"/>
+          <a:lstStyle/>
+          <a:p>
+            <a:pPr algn="l" indent="0" marL="0">
+              <a:lnSpc>
+                <a:spcPts val="3220"/>
+              </a:lnSpc>
+              <a:buNone/>
+            </a:pPr>
+            <a:r>
+              <a:rPr lang="en-US" sz="2300" b="1" dirty="0">
                 <a:solidFill>
                   <a:srgbClr val="203E31"/>
                 </a:solidFill>
@@ -3406,20 +3448,20 @@
               </a:rPr>
               <a:t>確認用</a:t>
             </a:r>
-            <a:endParaRPr lang="en-US" sz="2400" dirty="0"/>
-          </a:p>
-        </p:txBody>
-      </p:sp>
-      <p:sp>
-        <p:nvSpPr>
-          <p:cNvPr id="20" name="Text 18"/>
-          <p:cNvSpPr/>
-          <p:nvPr/>
-        </p:nvSpPr>
-        <p:spPr>
-          <a:xfrm>
-            <a:off x="8110984" y="5010596"/>
-            <a:ext cx="3488927" cy="304651"/>
+            <a:endParaRPr lang="en-US" sz="2300" dirty="0"/>
+          </a:p>
+        </p:txBody>
+      </p:sp>
+      <p:sp>
+        <p:nvSpPr>
+          <p:cNvPr id="22" name="Text 20"/>
+          <p:cNvSpPr/>
+          <p:nvPr/>
+        </p:nvSpPr>
+        <p:spPr>
+          <a:xfrm>
+            <a:off x="4571851" y="4660702"/>
+            <a:ext cx="2153198" cy="304651"/>
           </a:xfrm>
           <a:prstGeom prst="rect">
             <a:avLst/>
@@ -3435,9 +3477,6 @@
               <a:lnSpc>
                 <a:spcPts val="2400"/>
               </a:lnSpc>
-              <a:spcBef>
-                <a:spcPts val="800"/>
-              </a:spcBef>
               <a:buNone/>
             </a:pPr>
             <a:r>
@@ -3449,7 +3488,7 @@
                 <a:ea typeface="BIZ UDPGothic" pitchFamily="34" charset="-122"/>
                 <a:cs typeface="BIZ UDPGothic" pitchFamily="34" charset="-120"/>
               </a:rPr>
-              <a:t>公開・配布前とわかる印</a:t>
+              <a:t>公開・配布前と分かる印</a:t>
             </a:r>
             <a:endParaRPr lang="en-US" sz="1600" dirty="0"/>
           </a:p>
@@ -3457,7 +3496,7 @@
       </p:sp>
       <p:sp>
         <p:nvSpPr>
-          <p:cNvPr id="21" name="Text 19"/>
+          <p:cNvPr id="23" name="Text 21"/>
           <p:cNvSpPr/>
           <p:nvPr/>
         </p:nvSpPr>
@@ -3499,7 +3538,7 @@
       </p:sp>
       <p:sp>
         <p:nvSpPr>
-          <p:cNvPr id="22" name="Text 20"/>
+          <p:cNvPr id="24" name="Text 22"/>
           <p:cNvSpPr/>
           <p:nvPr/>
         </p:nvSpPr>
@@ -3541,7 +3580,7 @@
       </p:sp>
       <p:sp>
         <p:nvSpPr>
-          <p:cNvPr id="23" name="Text 21"/>
+          <p:cNvPr id="25" name="Text 23"/>
           <p:cNvSpPr/>
           <p:nvPr/>
         </p:nvSpPr>
@@ -3926,7 +3965,7 @@
         <p:spPr>
           <a:xfrm>
             <a:off x="660350" y="4192935"/>
-            <a:ext cx="5324094" cy="685800"/>
+            <a:ext cx="5219700" cy="685800"/>
           </a:xfrm>
           <a:prstGeom prst="rect">
             <a:avLst/>
@@ -3942,9 +3981,6 @@
               <a:lnSpc>
                 <a:spcPts val="2700"/>
               </a:lnSpc>
-              <a:spcBef>
-                <a:spcPts val="1700"/>
-              </a:spcBef>
               <a:buNone/>
             </a:pPr>
             <a:r>
@@ -3965,9 +4001,6 @@
               <a:lnSpc>
                 <a:spcPts val="2700"/>
               </a:lnSpc>
-              <a:spcBef>
-                <a:spcPts val="1700"/>
-              </a:spcBef>
               <a:buNone/>
             </a:pPr>
             <a:r>
@@ -4104,7 +4137,7 @@
         <p:spPr>
           <a:xfrm>
             <a:off x="6311801" y="4192935"/>
-            <a:ext cx="5324094" cy="685800"/>
+            <a:ext cx="5219700" cy="685800"/>
           </a:xfrm>
           <a:prstGeom prst="rect">
             <a:avLst/>
@@ -4120,9 +4153,6 @@
               <a:lnSpc>
                 <a:spcPts val="2700"/>
               </a:lnSpc>
-              <a:spcBef>
-                <a:spcPts val="1700"/>
-              </a:spcBef>
               <a:buNone/>
             </a:pPr>
             <a:r>
@@ -4143,9 +4173,6 @@
               <a:lnSpc>
                 <a:spcPts val="2700"/>
               </a:lnSpc>
-              <a:spcBef>
-                <a:spcPts val="1700"/>
-              </a:spcBef>
               <a:buNone/>
             </a:pPr>
             <a:r>
@@ -4566,29 +4593,26 @@
         <p:spPr>
           <a:xfrm>
             <a:off x="660350" y="3502223"/>
-            <a:ext cx="3454316" cy="647700"/>
-          </a:xfrm>
-          <a:prstGeom prst="rect">
-            <a:avLst/>
-          </a:prstGeom>
-          <a:noFill/>
-          <a:ln/>
-        </p:spPr>
-        <p:txBody>
-          <a:bodyPr wrap="square" lIns="0" tIns="0" rIns="0" bIns="0" rtlCol="0" anchor="t"/>
-          <a:lstStyle/>
-          <a:p>
-            <a:pPr algn="l" indent="0" marL="0">
-              <a:lnSpc>
-                <a:spcPts val="2550"/>
-              </a:lnSpc>
-              <a:spcBef>
-                <a:spcPts val="1700"/>
-              </a:spcBef>
-              <a:buNone/>
-            </a:pPr>
-            <a:r>
-              <a:rPr lang="en-US" sz="1700" dirty="0">
+            <a:ext cx="3386584" cy="685800"/>
+          </a:xfrm>
+          <a:prstGeom prst="rect">
+            <a:avLst/>
+          </a:prstGeom>
+          <a:noFill/>
+          <a:ln/>
+        </p:spPr>
+        <p:txBody>
+          <a:bodyPr wrap="square" lIns="0" tIns="0" rIns="0" bIns="0" rtlCol="0" anchor="t"/>
+          <a:lstStyle/>
+          <a:p>
+            <a:pPr algn="l" indent="0" marL="0">
+              <a:lnSpc>
+                <a:spcPts val="2700"/>
+              </a:lnSpc>
+              <a:buNone/>
+            </a:pPr>
+            <a:r>
+              <a:rPr lang="en-US" sz="1800" dirty="0">
                 <a:solidFill>
                   <a:srgbClr val="203E31"/>
                 </a:solidFill>
@@ -4598,20 +4622,17 @@
               </a:rPr>
               <a:t>渡すファイルとリンクを開く。</a:t>
             </a:r>
-            <a:endParaRPr lang="en-US" sz="1700" dirty="0"/>
-          </a:p>
-          <a:p>
-            <a:pPr algn="l" indent="0" marL="0">
-              <a:lnSpc>
-                <a:spcPts val="2550"/>
-              </a:lnSpc>
-              <a:spcBef>
-                <a:spcPts val="1700"/>
-              </a:spcBef>
-              <a:buNone/>
-            </a:pPr>
-            <a:r>
-              <a:rPr lang="en-US" sz="1700" dirty="0">
+            <a:endParaRPr lang="en-US" sz="1800" dirty="0"/>
+          </a:p>
+          <a:p>
+            <a:pPr algn="l" indent="0" marL="0">
+              <a:lnSpc>
+                <a:spcPts val="2700"/>
+              </a:lnSpc>
+              <a:buNone/>
+            </a:pPr>
+            <a:r>
+              <a:rPr lang="en-US" sz="1800" dirty="0">
                 <a:solidFill>
                   <a:srgbClr val="203E31"/>
                 </a:solidFill>
@@ -4621,7 +4642,7 @@
               </a:rPr>
               <a:t>必要なアクセス権も確認する。</a:t>
             </a:r>
-            <a:endParaRPr lang="en-US" sz="1700" dirty="0"/>
+            <a:endParaRPr lang="en-US" sz="1800" dirty="0"/>
           </a:p>
         </p:txBody>
       </p:sp>
@@ -4721,29 +4742,26 @@
         <p:spPr>
           <a:xfrm>
             <a:off x="4402485" y="3502223"/>
-            <a:ext cx="3454467" cy="647700"/>
-          </a:xfrm>
-          <a:prstGeom prst="rect">
-            <a:avLst/>
-          </a:prstGeom>
-          <a:noFill/>
-          <a:ln/>
-        </p:spPr>
-        <p:txBody>
-          <a:bodyPr wrap="square" lIns="0" tIns="0" rIns="0" bIns="0" rtlCol="0" anchor="t"/>
-          <a:lstStyle/>
-          <a:p>
-            <a:pPr algn="l" indent="0" marL="0">
-              <a:lnSpc>
-                <a:spcPts val="2550"/>
-              </a:lnSpc>
-              <a:spcBef>
-                <a:spcPts val="1700"/>
-              </a:spcBef>
-              <a:buNone/>
-            </a:pPr>
-            <a:r>
-              <a:rPr lang="en-US" sz="1700" dirty="0">
+            <a:ext cx="3386733" cy="685800"/>
+          </a:xfrm>
+          <a:prstGeom prst="rect">
+            <a:avLst/>
+          </a:prstGeom>
+          <a:noFill/>
+          <a:ln/>
+        </p:spPr>
+        <p:txBody>
+          <a:bodyPr wrap="square" lIns="0" tIns="0" rIns="0" bIns="0" rtlCol="0" anchor="t"/>
+          <a:lstStyle/>
+          <a:p>
+            <a:pPr algn="l" indent="0" marL="0">
+              <a:lnSpc>
+                <a:spcPts val="2700"/>
+              </a:lnSpc>
+              <a:buNone/>
+            </a:pPr>
+            <a:r>
+              <a:rPr lang="en-US" sz="1800" dirty="0">
                 <a:solidFill>
                   <a:srgbClr val="203E31"/>
                 </a:solidFill>
@@ -4753,20 +4771,17 @@
               </a:rPr>
               <a:t>全ページの文字・図・表を見る。</a:t>
             </a:r>
-            <a:endParaRPr lang="en-US" sz="1700" dirty="0"/>
-          </a:p>
-          <a:p>
-            <a:pPr algn="l" indent="0" marL="0">
-              <a:lnSpc>
-                <a:spcPts val="2550"/>
-              </a:lnSpc>
-              <a:spcBef>
-                <a:spcPts val="1700"/>
-              </a:spcBef>
-              <a:buNone/>
-            </a:pPr>
-            <a:r>
-              <a:rPr lang="en-US" sz="1700" dirty="0">
+            <a:endParaRPr lang="en-US" sz="1800" dirty="0"/>
+          </a:p>
+          <a:p>
+            <a:pPr algn="l" indent="0" marL="0">
+              <a:lnSpc>
+                <a:spcPts val="2700"/>
+              </a:lnSpc>
+              <a:buNone/>
+            </a:pPr>
+            <a:r>
+              <a:rPr lang="en-US" sz="1800" dirty="0">
                 <a:solidFill>
                   <a:srgbClr val="203E31"/>
                 </a:solidFill>
@@ -4776,7 +4791,7 @@
               </a:rPr>
               <a:t>字体の置き換わりにも気を配る。</a:t>
             </a:r>
-            <a:endParaRPr lang="en-US" sz="1700" dirty="0"/>
+            <a:endParaRPr lang="en-US" sz="1800" dirty="0"/>
           </a:p>
         </p:txBody>
       </p:sp>
@@ -4876,29 +4891,26 @@
         <p:spPr>
           <a:xfrm>
             <a:off x="8144768" y="3502223"/>
-            <a:ext cx="3454316" cy="647700"/>
-          </a:xfrm>
-          <a:prstGeom prst="rect">
-            <a:avLst/>
-          </a:prstGeom>
-          <a:noFill/>
-          <a:ln/>
-        </p:spPr>
-        <p:txBody>
-          <a:bodyPr wrap="square" lIns="0" tIns="0" rIns="0" bIns="0" rtlCol="0" anchor="t"/>
-          <a:lstStyle/>
-          <a:p>
-            <a:pPr algn="l" indent="0" marL="0">
-              <a:lnSpc>
-                <a:spcPts val="2550"/>
-              </a:lnSpc>
-              <a:spcBef>
-                <a:spcPts val="1700"/>
-              </a:spcBef>
-              <a:buNone/>
-            </a:pPr>
-            <a:r>
-              <a:rPr lang="en-US" sz="1700" dirty="0">
+            <a:ext cx="3386584" cy="685800"/>
+          </a:xfrm>
+          <a:prstGeom prst="rect">
+            <a:avLst/>
+          </a:prstGeom>
+          <a:noFill/>
+          <a:ln/>
+        </p:spPr>
+        <p:txBody>
+          <a:bodyPr wrap="square" lIns="0" tIns="0" rIns="0" bIns="0" rtlCol="0" anchor="t"/>
+          <a:lstStyle/>
+          <a:p>
+            <a:pPr algn="l" indent="0" marL="0">
+              <a:lnSpc>
+                <a:spcPts val="2700"/>
+              </a:lnSpc>
+              <a:buNone/>
+            </a:pPr>
+            <a:r>
+              <a:rPr lang="en-US" sz="1800" dirty="0">
                 <a:solidFill>
                   <a:srgbClr val="203E31"/>
                 </a:solidFill>
@@ -4908,20 +4920,17 @@
               </a:rPr>
               <a:t>編集が必要なら、コピーで試す。</a:t>
             </a:r>
-            <a:endParaRPr lang="en-US" sz="1700" dirty="0"/>
-          </a:p>
-          <a:p>
-            <a:pPr algn="l" indent="0" marL="0">
-              <a:lnSpc>
-                <a:spcPts val="2550"/>
-              </a:lnSpc>
-              <a:spcBef>
-                <a:spcPts val="1700"/>
-              </a:spcBef>
-              <a:buNone/>
-            </a:pPr>
-            <a:r>
-              <a:rPr lang="en-US" sz="1700" dirty="0">
+            <a:endParaRPr lang="en-US" sz="1800" dirty="0"/>
+          </a:p>
+          <a:p>
+            <a:pPr algn="l" indent="0" marL="0">
+              <a:lnSpc>
+                <a:spcPts val="2700"/>
+              </a:lnSpc>
+              <a:buNone/>
+            </a:pPr>
+            <a:r>
+              <a:rPr lang="en-US" sz="1800" dirty="0">
                 <a:solidFill>
                   <a:srgbClr val="203E31"/>
                 </a:solidFill>
@@ -4931,7 +4940,7 @@
               </a:rPr>
               <a:t>元の資料を保って確認する。</a:t>
             </a:r>
-            <a:endParaRPr lang="en-US" sz="1700" dirty="0"/>
+            <a:endParaRPr lang="en-US" sz="1800" dirty="0"/>
           </a:p>
         </p:txBody>
       </p:sp>
